--- a/Project/CurrencyPrediction/Result/Result_Plot.pptx
+++ b/Project/CurrencyPrediction/Result/Result_Plot.pptx
@@ -5,9 +5,9 @@
     <p:sldMasterId id="2147483648" r:id="rId1"/>
   </p:sldMasterIdLst>
   <p:sldIdLst>
-    <p:sldId id="256" r:id="rId2"/>
-    <p:sldId id="257" r:id="rId3"/>
-    <p:sldId id="258" r:id="rId4"/>
+    <p:sldId id="262" r:id="rId2"/>
+    <p:sldId id="263" r:id="rId3"/>
+    <p:sldId id="264" r:id="rId4"/>
     <p:sldId id="259" r:id="rId5"/>
     <p:sldId id="260" r:id="rId6"/>
     <p:sldId id="261" r:id="rId7"/>
@@ -264,7 +264,7 @@
           <a:p>
             <a:fld id="{A3BF353C-3DD2-44DF-A8C3-FEAEBCE71137}" type="datetimeFigureOut">
               <a:rPr lang="ko-KR" altLang="en-US" smtClean="0"/>
-              <a:t>2026-02-03</a:t>
+              <a:t>2026-03-09</a:t>
             </a:fld>
             <a:endParaRPr lang="ko-KR" altLang="en-US"/>
           </a:p>
@@ -462,7 +462,7 @@
           <a:p>
             <a:fld id="{A3BF353C-3DD2-44DF-A8C3-FEAEBCE71137}" type="datetimeFigureOut">
               <a:rPr lang="ko-KR" altLang="en-US" smtClean="0"/>
-              <a:t>2026-02-03</a:t>
+              <a:t>2026-03-09</a:t>
             </a:fld>
             <a:endParaRPr lang="ko-KR" altLang="en-US"/>
           </a:p>
@@ -670,7 +670,7 @@
           <a:p>
             <a:fld id="{A3BF353C-3DD2-44DF-A8C3-FEAEBCE71137}" type="datetimeFigureOut">
               <a:rPr lang="ko-KR" altLang="en-US" smtClean="0"/>
-              <a:t>2026-02-03</a:t>
+              <a:t>2026-03-09</a:t>
             </a:fld>
             <a:endParaRPr lang="ko-KR" altLang="en-US"/>
           </a:p>
@@ -868,7 +868,7 @@
           <a:p>
             <a:fld id="{A3BF353C-3DD2-44DF-A8C3-FEAEBCE71137}" type="datetimeFigureOut">
               <a:rPr lang="ko-KR" altLang="en-US" smtClean="0"/>
-              <a:t>2026-02-03</a:t>
+              <a:t>2026-03-09</a:t>
             </a:fld>
             <a:endParaRPr lang="ko-KR" altLang="en-US"/>
           </a:p>
@@ -1143,7 +1143,7 @@
           <a:p>
             <a:fld id="{A3BF353C-3DD2-44DF-A8C3-FEAEBCE71137}" type="datetimeFigureOut">
               <a:rPr lang="ko-KR" altLang="en-US" smtClean="0"/>
-              <a:t>2026-02-03</a:t>
+              <a:t>2026-03-09</a:t>
             </a:fld>
             <a:endParaRPr lang="ko-KR" altLang="en-US"/>
           </a:p>
@@ -1408,7 +1408,7 @@
           <a:p>
             <a:fld id="{A3BF353C-3DD2-44DF-A8C3-FEAEBCE71137}" type="datetimeFigureOut">
               <a:rPr lang="ko-KR" altLang="en-US" smtClean="0"/>
-              <a:t>2026-02-03</a:t>
+              <a:t>2026-03-09</a:t>
             </a:fld>
             <a:endParaRPr lang="ko-KR" altLang="en-US"/>
           </a:p>
@@ -1820,7 +1820,7 @@
           <a:p>
             <a:fld id="{A3BF353C-3DD2-44DF-A8C3-FEAEBCE71137}" type="datetimeFigureOut">
               <a:rPr lang="ko-KR" altLang="en-US" smtClean="0"/>
-              <a:t>2026-02-03</a:t>
+              <a:t>2026-03-09</a:t>
             </a:fld>
             <a:endParaRPr lang="ko-KR" altLang="en-US"/>
           </a:p>
@@ -1961,7 +1961,7 @@
           <a:p>
             <a:fld id="{A3BF353C-3DD2-44DF-A8C3-FEAEBCE71137}" type="datetimeFigureOut">
               <a:rPr lang="ko-KR" altLang="en-US" smtClean="0"/>
-              <a:t>2026-02-03</a:t>
+              <a:t>2026-03-09</a:t>
             </a:fld>
             <a:endParaRPr lang="ko-KR" altLang="en-US"/>
           </a:p>
@@ -2074,7 +2074,7 @@
           <a:p>
             <a:fld id="{A3BF353C-3DD2-44DF-A8C3-FEAEBCE71137}" type="datetimeFigureOut">
               <a:rPr lang="ko-KR" altLang="en-US" smtClean="0"/>
-              <a:t>2026-02-03</a:t>
+              <a:t>2026-03-09</a:t>
             </a:fld>
             <a:endParaRPr lang="ko-KR" altLang="en-US"/>
           </a:p>
@@ -2385,7 +2385,7 @@
           <a:p>
             <a:fld id="{A3BF353C-3DD2-44DF-A8C3-FEAEBCE71137}" type="datetimeFigureOut">
               <a:rPr lang="ko-KR" altLang="en-US" smtClean="0"/>
-              <a:t>2026-02-03</a:t>
+              <a:t>2026-03-09</a:t>
             </a:fld>
             <a:endParaRPr lang="ko-KR" altLang="en-US"/>
           </a:p>
@@ -2673,7 +2673,7 @@
           <a:p>
             <a:fld id="{A3BF353C-3DD2-44DF-A8C3-FEAEBCE71137}" type="datetimeFigureOut">
               <a:rPr lang="ko-KR" altLang="en-US" smtClean="0"/>
-              <a:t>2026-02-03</a:t>
+              <a:t>2026-03-09</a:t>
             </a:fld>
             <a:endParaRPr lang="ko-KR" altLang="en-US"/>
           </a:p>
@@ -2914,7 +2914,7 @@
           <a:p>
             <a:fld id="{A3BF353C-3DD2-44DF-A8C3-FEAEBCE71137}" type="datetimeFigureOut">
               <a:rPr lang="ko-KR" altLang="en-US" smtClean="0"/>
-              <a:t>2026-02-03</a:t>
+              <a:t>2026-03-09</a:t>
             </a:fld>
             <a:endParaRPr lang="ko-KR" altLang="en-US"/>
           </a:p>
@@ -3319,7 +3319,13 @@
   <p:cSld>
     <p:spTree>
       <p:nvGrpSpPr>
-        <p:cNvPr id="1" name=""/>
+        <p:cNvPr id="1" name="">
+          <a:extLst>
+            <a:ext uri="{FF2B5EF4-FFF2-40B4-BE49-F238E27FC236}">
+              <a16:creationId xmlns:a16="http://schemas.microsoft.com/office/drawing/2014/main" id="{BA72A451-F0A2-35F6-77C6-2A6DCF4EFC28}"/>
+            </a:ext>
+          </a:extLst>
+        </p:cNvPr>
         <p:cNvGrpSpPr/>
         <p:nvPr/>
       </p:nvGrpSpPr>
@@ -3333,10 +3339,10 @@
       </p:grpSpPr>
       <p:pic>
         <p:nvPicPr>
-          <p:cNvPr id="3" name="그림 2" descr="도표, 원, 스케치, 그림이(가) 표시된 사진&#10;&#10;AI 생성 콘텐츠는 정확하지 않을 수 있습니다.">
-            <a:extLst>
-              <a:ext uri="{FF2B5EF4-FFF2-40B4-BE49-F238E27FC236}">
-                <a16:creationId xmlns:a16="http://schemas.microsoft.com/office/drawing/2014/main" id="{CF2401F4-46CB-AB50-D410-D1C7A5A947D6}"/>
+          <p:cNvPr id="3" name="그림 2">
+            <a:extLst>
+              <a:ext uri="{FF2B5EF4-FFF2-40B4-BE49-F238E27FC236}">
+                <a16:creationId xmlns:a16="http://schemas.microsoft.com/office/drawing/2014/main" id="{702139BD-EED9-E3E0-0589-29A6A9A4B506}"/>
               </a:ext>
             </a:extLst>
           </p:cNvPr>
@@ -3346,15 +3352,20 @@
           <p:nvPr/>
         </p:nvPicPr>
         <p:blipFill>
-          <a:blip r:embed="rId2"/>
-          <a:stretch>
-            <a:fillRect/>
-          </a:stretch>
+          <a:blip r:embed="rId2">
+            <a:extLst>
+              <a:ext uri="{28A0092B-C50C-407E-A947-70E740481C1C}">
+                <a14:useLocalDpi xmlns:a14="http://schemas.microsoft.com/office/drawing/2010/main" val="0"/>
+              </a:ext>
+            </a:extLst>
+          </a:blip>
+          <a:srcRect/>
+          <a:stretch/>
         </p:blipFill>
         <p:spPr>
           <a:xfrm>
-            <a:off x="864123" y="0"/>
-            <a:ext cx="10463753" cy="6858000"/>
+            <a:off x="864123" y="97913"/>
+            <a:ext cx="10463753" cy="6662173"/>
           </a:xfrm>
           <a:prstGeom prst="rect">
             <a:avLst/>
@@ -3366,7 +3377,7 @@
           <p:cNvPr id="6" name="직사각형 5">
             <a:extLst>
               <a:ext uri="{FF2B5EF4-FFF2-40B4-BE49-F238E27FC236}">
-                <a16:creationId xmlns:a16="http://schemas.microsoft.com/office/drawing/2014/main" id="{D2603F3E-53C8-CF12-67D2-1BBCC00A8742}"/>
+                <a16:creationId xmlns:a16="http://schemas.microsoft.com/office/drawing/2014/main" id="{FA07354C-60FF-DB8B-FE91-49C00F5AD4A8}"/>
               </a:ext>
             </a:extLst>
           </p:cNvPr>
@@ -3375,7 +3386,7 @@
         </p:nvSpPr>
         <p:spPr>
           <a:xfrm>
-            <a:off x="7231372" y="2674720"/>
+            <a:off x="7181672" y="2704540"/>
             <a:ext cx="4152304" cy="245721"/>
           </a:xfrm>
           <a:prstGeom prst="rect">
@@ -3417,7 +3428,7 @@
     </p:spTree>
     <p:extLst>
       <p:ext uri="{BB962C8B-B14F-4D97-AF65-F5344CB8AC3E}">
-        <p14:creationId xmlns:p14="http://schemas.microsoft.com/office/powerpoint/2010/main" val="1937278884"/>
+        <p14:creationId xmlns:p14="http://schemas.microsoft.com/office/powerpoint/2010/main" val="1951503405"/>
       </p:ext>
     </p:extLst>
   </p:cSld>
@@ -3435,7 +3446,7 @@
         <p:cNvPr id="1" name="">
           <a:extLst>
             <a:ext uri="{FF2B5EF4-FFF2-40B4-BE49-F238E27FC236}">
-              <a16:creationId xmlns:a16="http://schemas.microsoft.com/office/drawing/2014/main" id="{FF9E70C4-EB4F-0B51-8CD8-FA71C7B95EAB}"/>
+              <a16:creationId xmlns:a16="http://schemas.microsoft.com/office/drawing/2014/main" id="{6EC79692-C548-D16E-97DF-BFBA95DB8A6A}"/>
             </a:ext>
           </a:extLst>
         </p:cNvPr>
@@ -3452,10 +3463,10 @@
       </p:grpSpPr>
       <p:pic>
         <p:nvPicPr>
-          <p:cNvPr id="5" name="그림 4" descr="도표, 원, 스케치, 그림이(가) 표시된 사진&#10;&#10;AI 생성 콘텐츠는 정확하지 않을 수 있습니다.">
-            <a:extLst>
-              <a:ext uri="{FF2B5EF4-FFF2-40B4-BE49-F238E27FC236}">
-                <a16:creationId xmlns:a16="http://schemas.microsoft.com/office/drawing/2014/main" id="{2604CC18-AD0D-B82F-2141-A749EA9B0F97}"/>
+          <p:cNvPr id="5" name="그림 4">
+            <a:extLst>
+              <a:ext uri="{FF2B5EF4-FFF2-40B4-BE49-F238E27FC236}">
+                <a16:creationId xmlns:a16="http://schemas.microsoft.com/office/drawing/2014/main" id="{594406E3-CF5E-267A-758B-4B2ADC3EAD09}"/>
               </a:ext>
             </a:extLst>
           </p:cNvPr>
@@ -3465,15 +3476,20 @@
           <p:nvPr/>
         </p:nvPicPr>
         <p:blipFill>
-          <a:blip r:embed="rId2"/>
-          <a:stretch>
-            <a:fillRect/>
-          </a:stretch>
+          <a:blip r:embed="rId2">
+            <a:extLst>
+              <a:ext uri="{28A0092B-C50C-407E-A947-70E740481C1C}">
+                <a14:useLocalDpi xmlns:a14="http://schemas.microsoft.com/office/drawing/2010/main" val="0"/>
+              </a:ext>
+            </a:extLst>
+          </a:blip>
+          <a:srcRect/>
+          <a:stretch/>
         </p:blipFill>
         <p:spPr>
           <a:xfrm>
-            <a:off x="733452" y="0"/>
-            <a:ext cx="10725095" cy="6858000"/>
+            <a:off x="733452" y="57513"/>
+            <a:ext cx="10725095" cy="6742973"/>
           </a:xfrm>
           <a:prstGeom prst="rect">
             <a:avLst/>
@@ -3485,7 +3501,7 @@
           <p:cNvPr id="8" name="직사각형 7">
             <a:extLst>
               <a:ext uri="{FF2B5EF4-FFF2-40B4-BE49-F238E27FC236}">
-                <a16:creationId xmlns:a16="http://schemas.microsoft.com/office/drawing/2014/main" id="{CE144096-F184-9D65-2A92-C538F27A72E7}"/>
+                <a16:creationId xmlns:a16="http://schemas.microsoft.com/office/drawing/2014/main" id="{D3EBF2C5-5FF1-D510-C484-693CD9066511}"/>
               </a:ext>
             </a:extLst>
           </p:cNvPr>
@@ -3494,7 +3510,7 @@
         </p:nvSpPr>
         <p:spPr>
           <a:xfrm>
-            <a:off x="7231372" y="3652182"/>
+            <a:off x="7131972" y="2951469"/>
             <a:ext cx="4152304" cy="245721"/>
           </a:xfrm>
           <a:prstGeom prst="rect">
@@ -3538,7 +3554,7 @@
           <p:cNvPr id="9" name="직사각형 8">
             <a:extLst>
               <a:ext uri="{FF2B5EF4-FFF2-40B4-BE49-F238E27FC236}">
-                <a16:creationId xmlns:a16="http://schemas.microsoft.com/office/drawing/2014/main" id="{013FA795-D481-DB4F-F169-AB7C51E0642E}"/>
+                <a16:creationId xmlns:a16="http://schemas.microsoft.com/office/drawing/2014/main" id="{E21EE93E-8493-CB7F-6569-6C44AB767942}"/>
               </a:ext>
             </a:extLst>
           </p:cNvPr>
@@ -3547,7 +3563,7 @@
         </p:nvSpPr>
         <p:spPr>
           <a:xfrm>
-            <a:off x="7231372" y="3139804"/>
+            <a:off x="7131972" y="3184534"/>
             <a:ext cx="4152304" cy="245721"/>
           </a:xfrm>
           <a:prstGeom prst="rect">
@@ -3591,7 +3607,7 @@
           <p:cNvPr id="12" name="직사각형 11">
             <a:extLst>
               <a:ext uri="{FF2B5EF4-FFF2-40B4-BE49-F238E27FC236}">
-                <a16:creationId xmlns:a16="http://schemas.microsoft.com/office/drawing/2014/main" id="{5CF0D11C-7390-6ED8-B75A-69A46FF83C96}"/>
+                <a16:creationId xmlns:a16="http://schemas.microsoft.com/office/drawing/2014/main" id="{266E3453-56BB-FB3E-557E-68CC3BBA4902}"/>
               </a:ext>
             </a:extLst>
           </p:cNvPr>
@@ -3600,7 +3616,7 @@
         </p:nvSpPr>
         <p:spPr>
           <a:xfrm>
-            <a:off x="7231372" y="2406707"/>
+            <a:off x="7131972" y="2436527"/>
             <a:ext cx="4152304" cy="245721"/>
           </a:xfrm>
           <a:prstGeom prst="rect">
@@ -3642,7 +3658,7 @@
     </p:spTree>
     <p:extLst>
       <p:ext uri="{BB962C8B-B14F-4D97-AF65-F5344CB8AC3E}">
-        <p14:creationId xmlns:p14="http://schemas.microsoft.com/office/powerpoint/2010/main" val="2632473085"/>
+        <p14:creationId xmlns:p14="http://schemas.microsoft.com/office/powerpoint/2010/main" val="564801298"/>
       </p:ext>
     </p:extLst>
   </p:cSld>
@@ -3660,7 +3676,7 @@
         <p:cNvPr id="1" name="">
           <a:extLst>
             <a:ext uri="{FF2B5EF4-FFF2-40B4-BE49-F238E27FC236}">
-              <a16:creationId xmlns:a16="http://schemas.microsoft.com/office/drawing/2014/main" id="{C4C72CE7-A395-65B3-C615-AEB2C3203F73}"/>
+              <a16:creationId xmlns:a16="http://schemas.microsoft.com/office/drawing/2014/main" id="{FDED99A1-6D03-64D8-1043-135702AD58E5}"/>
             </a:ext>
           </a:extLst>
         </p:cNvPr>
@@ -3677,10 +3693,10 @@
       </p:grpSpPr>
       <p:pic>
         <p:nvPicPr>
-          <p:cNvPr id="3" name="그림 2" descr="도표, 원, 텍스트, 스케치이(가) 표시된 사진&#10;&#10;AI 생성 콘텐츠는 정확하지 않을 수 있습니다.">
-            <a:extLst>
-              <a:ext uri="{FF2B5EF4-FFF2-40B4-BE49-F238E27FC236}">
-                <a16:creationId xmlns:a16="http://schemas.microsoft.com/office/drawing/2014/main" id="{0794E9AD-17AA-03E5-4130-6A2DE7531145}"/>
+          <p:cNvPr id="3" name="그림 2">
+            <a:extLst>
+              <a:ext uri="{FF2B5EF4-FFF2-40B4-BE49-F238E27FC236}">
+                <a16:creationId xmlns:a16="http://schemas.microsoft.com/office/drawing/2014/main" id="{F00D7FFC-68E8-8DEB-EA2F-B428320FBDCC}"/>
               </a:ext>
             </a:extLst>
           </p:cNvPr>
@@ -3690,15 +3706,20 @@
           <p:nvPr/>
         </p:nvPicPr>
         <p:blipFill>
-          <a:blip r:embed="rId2"/>
-          <a:stretch>
-            <a:fillRect/>
-          </a:stretch>
+          <a:blip r:embed="rId2">
+            <a:extLst>
+              <a:ext uri="{28A0092B-C50C-407E-A947-70E740481C1C}">
+                <a14:useLocalDpi xmlns:a14="http://schemas.microsoft.com/office/drawing/2010/main" val="0"/>
+              </a:ext>
+            </a:extLst>
+          </a:blip>
+          <a:srcRect/>
+          <a:stretch/>
         </p:blipFill>
         <p:spPr>
           <a:xfrm>
-            <a:off x="849950" y="0"/>
-            <a:ext cx="10492099" cy="6858000"/>
+            <a:off x="849950" y="44964"/>
+            <a:ext cx="10492099" cy="6768071"/>
           </a:xfrm>
           <a:prstGeom prst="rect">
             <a:avLst/>
@@ -3710,7 +3731,7 @@
           <p:cNvPr id="6" name="직사각형 5">
             <a:extLst>
               <a:ext uri="{FF2B5EF4-FFF2-40B4-BE49-F238E27FC236}">
-                <a16:creationId xmlns:a16="http://schemas.microsoft.com/office/drawing/2014/main" id="{1C9A80DC-7DF9-4C7A-09E5-7C88C9349EC4}"/>
+                <a16:creationId xmlns:a16="http://schemas.microsoft.com/office/drawing/2014/main" id="{B29C2767-3173-5035-701B-ABBB481C9A64}"/>
               </a:ext>
             </a:extLst>
           </p:cNvPr>
@@ -3719,7 +3740,7 @@
         </p:nvSpPr>
         <p:spPr>
           <a:xfrm>
-            <a:off x="7231372" y="2666846"/>
+            <a:off x="7231372" y="2925266"/>
             <a:ext cx="4152304" cy="245721"/>
           </a:xfrm>
           <a:prstGeom prst="rect">
@@ -3761,7 +3782,7 @@
     </p:spTree>
     <p:extLst>
       <p:ext uri="{BB962C8B-B14F-4D97-AF65-F5344CB8AC3E}">
-        <p14:creationId xmlns:p14="http://schemas.microsoft.com/office/powerpoint/2010/main" val="3098395621"/>
+        <p14:creationId xmlns:p14="http://schemas.microsoft.com/office/powerpoint/2010/main" val="877190004"/>
       </p:ext>
     </p:extLst>
   </p:cSld>
@@ -3796,7 +3817,7 @@
       </p:grpSpPr>
       <p:pic>
         <p:nvPicPr>
-          <p:cNvPr id="4" name="그림 3" descr="도표, 원, 스케치, 디자인이(가) 표시된 사진&#10;&#10;AI 생성 콘텐츠는 정확하지 않을 수 있습니다.">
+          <p:cNvPr id="4" name="그림 3">
             <a:extLst>
               <a:ext uri="{FF2B5EF4-FFF2-40B4-BE49-F238E27FC236}">
                 <a16:creationId xmlns:a16="http://schemas.microsoft.com/office/drawing/2014/main" id="{FC85CF81-37A4-8DFE-7EAB-760932F80742}"/>
@@ -3809,15 +3830,20 @@
           <p:nvPr/>
         </p:nvPicPr>
         <p:blipFill>
-          <a:blip r:embed="rId2"/>
-          <a:stretch>
-            <a:fillRect/>
-          </a:stretch>
+          <a:blip r:embed="rId2">
+            <a:extLst>
+              <a:ext uri="{28A0092B-C50C-407E-A947-70E740481C1C}">
+                <a14:useLocalDpi xmlns:a14="http://schemas.microsoft.com/office/drawing/2010/main" val="0"/>
+              </a:ext>
+            </a:extLst>
+          </a:blip>
+          <a:srcRect/>
+          <a:stretch/>
         </p:blipFill>
         <p:spPr>
           <a:xfrm>
-            <a:off x="718332" y="0"/>
-            <a:ext cx="10755335" cy="6858000"/>
+            <a:off x="718332" y="12752"/>
+            <a:ext cx="10755335" cy="6832495"/>
           </a:xfrm>
           <a:prstGeom prst="rect">
             <a:avLst/>
@@ -3838,7 +3864,7 @@
         </p:nvSpPr>
         <p:spPr>
           <a:xfrm>
-            <a:off x="7231372" y="2406710"/>
+            <a:off x="7181672" y="2436530"/>
             <a:ext cx="4152304" cy="245721"/>
           </a:xfrm>
           <a:prstGeom prst="rect">
@@ -3915,7 +3941,7 @@
       </p:grpSpPr>
       <p:pic>
         <p:nvPicPr>
-          <p:cNvPr id="3" name="그림 2" descr="도표, 원, 디자인, 종이접기이(가) 표시된 사진&#10;&#10;AI 생성 콘텐츠는 정확하지 않을 수 있습니다.">
+          <p:cNvPr id="3" name="그림 2">
             <a:extLst>
               <a:ext uri="{FF2B5EF4-FFF2-40B4-BE49-F238E27FC236}">
                 <a16:creationId xmlns:a16="http://schemas.microsoft.com/office/drawing/2014/main" id="{4FF81AC1-C6C8-6FBD-7CB6-F99472EDB535}"/>
@@ -3928,15 +3954,20 @@
           <p:nvPr/>
         </p:nvPicPr>
         <p:blipFill>
-          <a:blip r:embed="rId2"/>
-          <a:stretch>
-            <a:fillRect/>
-          </a:stretch>
+          <a:blip r:embed="rId2">
+            <a:extLst>
+              <a:ext uri="{28A0092B-C50C-407E-A947-70E740481C1C}">
+                <a14:useLocalDpi xmlns:a14="http://schemas.microsoft.com/office/drawing/2010/main" val="0"/>
+              </a:ext>
+            </a:extLst>
+          </a:blip>
+          <a:srcRect/>
+          <a:stretch/>
         </p:blipFill>
         <p:spPr>
           <a:xfrm>
-            <a:off x="761280" y="0"/>
-            <a:ext cx="10669440" cy="6858000"/>
+            <a:off x="899020" y="0"/>
+            <a:ext cx="10393959" cy="6858000"/>
           </a:xfrm>
           <a:prstGeom prst="rect">
             <a:avLst/>
@@ -3957,7 +3988,7 @@
         </p:nvSpPr>
         <p:spPr>
           <a:xfrm>
-            <a:off x="7231372" y="2414593"/>
+            <a:off x="7380472" y="2414593"/>
             <a:ext cx="4152304" cy="245721"/>
           </a:xfrm>
           <a:prstGeom prst="rect">
@@ -4034,7 +4065,7 @@
       </p:grpSpPr>
       <p:pic>
         <p:nvPicPr>
-          <p:cNvPr id="4" name="그림 3" descr="도표, 스케치, 디자인, 종이접기이(가) 표시된 사진&#10;&#10;AI 생성 콘텐츠는 정확하지 않을 수 있습니다.">
+          <p:cNvPr id="4" name="그림 3">
             <a:extLst>
               <a:ext uri="{FF2B5EF4-FFF2-40B4-BE49-F238E27FC236}">
                 <a16:creationId xmlns:a16="http://schemas.microsoft.com/office/drawing/2014/main" id="{D82F389B-DE00-4C0F-3D9C-D4195C191639}"/>
@@ -4047,15 +4078,20 @@
           <p:nvPr/>
         </p:nvPicPr>
         <p:blipFill>
-          <a:blip r:embed="rId2"/>
-          <a:stretch>
-            <a:fillRect/>
-          </a:stretch>
+          <a:blip r:embed="rId2">
+            <a:extLst>
+              <a:ext uri="{28A0092B-C50C-407E-A947-70E740481C1C}">
+                <a14:useLocalDpi xmlns:a14="http://schemas.microsoft.com/office/drawing/2010/main" val="0"/>
+              </a:ext>
+            </a:extLst>
+          </a:blip>
+          <a:srcRect/>
+          <a:stretch/>
         </p:blipFill>
         <p:spPr>
           <a:xfrm>
-            <a:off x="905050" y="0"/>
-            <a:ext cx="10381899" cy="6858000"/>
+            <a:off x="905050" y="76055"/>
+            <a:ext cx="10381899" cy="6705890"/>
           </a:xfrm>
           <a:prstGeom prst="rect">
             <a:avLst/>
@@ -4076,7 +4112,7 @@
         </p:nvSpPr>
         <p:spPr>
           <a:xfrm>
-            <a:off x="7231372" y="2414593"/>
+            <a:off x="7256222" y="2434473"/>
             <a:ext cx="4152304" cy="245721"/>
           </a:xfrm>
           <a:prstGeom prst="rect">
